--- a/Customer_Churn_Prediction_Presentation.pptx
+++ b/Customer_Churn_Prediction_Presentation.pptx
@@ -3210,8 +3210,8 @@
         </p:nvSpPr>
         <p:spPr>
           <a:xfrm>
-            <a:off x="5915024" y="6074974"/>
-            <a:ext cx="3557587" cy="461665"/>
+            <a:off x="171452" y="4806851"/>
+            <a:ext cx="8972548" cy="1018869"/>
           </a:xfrm>
           <a:prstGeom prst="rect">
             <a:avLst/>
@@ -3224,12 +3224,29 @@
           </a:bodyPr>
           <a:lstStyle/>
           <a:p>
-            <a:pPr algn="ctr"/>
+            <a:pPr algn="ctr">
+              <a:lnSpc>
+                <a:spcPct val="150000"/>
+              </a:lnSpc>
+            </a:pPr>
             <a:r>
               <a:rPr lang="en-US" sz="2400" dirty="0"/>
               <a:t>Shreeya Dash</a:t>
             </a:r>
-            <a:endParaRPr lang="en-IN" sz="2400" dirty="0"/>
+          </a:p>
+          <a:p>
+            <a:pPr algn="ctr">
+              <a:lnSpc>
+                <a:spcPct val="150000"/>
+              </a:lnSpc>
+            </a:pPr>
+            <a:r>
+              <a:rPr lang="en-US" dirty="0">
+                <a:hlinkClick r:id="rId2"/>
+              </a:rPr>
+              <a:t>https://github.com/shreeya9094/Customer_Churn_Prediction_E2E_AI_ML_Project</a:t>
+            </a:r>
+            <a:endParaRPr lang="en-IN" dirty="0"/>
           </a:p>
         </p:txBody>
       </p:sp>

--- a/Customer_Churn_Prediction_Presentation.pptx
+++ b/Customer_Churn_Prediction_Presentation.pptx
@@ -3211,7 +3211,7 @@
         <p:spPr>
           <a:xfrm>
             <a:off x="171452" y="4806851"/>
-            <a:ext cx="8972548" cy="1018869"/>
+            <a:ext cx="8972548" cy="1434367"/>
           </a:xfrm>
           <a:prstGeom prst="rect">
             <a:avLst/>
@@ -3224,18 +3224,18 @@
           </a:bodyPr>
           <a:lstStyle/>
           <a:p>
-            <a:pPr algn="ctr">
+            <a:pPr algn="just">
               <a:lnSpc>
                 <a:spcPct val="150000"/>
               </a:lnSpc>
             </a:pPr>
             <a:r>
               <a:rPr lang="en-US" sz="2400" dirty="0"/>
-              <a:t>Shreeya Dash</a:t>
-            </a:r>
-          </a:p>
-          <a:p>
-            <a:pPr algn="ctr">
+              <a:t>By : Shreeya Dash</a:t>
+            </a:r>
+          </a:p>
+          <a:p>
+            <a:pPr>
               <a:lnSpc>
                 <a:spcPct val="150000"/>
               </a:lnSpc>
@@ -3245,6 +3245,20 @@
                 <a:hlinkClick r:id="rId2"/>
               </a:rPr>
               <a:t>https://github.com/shreeya9094/Customer_Churn_Prediction_E2E_AI_ML_Project</a:t>
+            </a:r>
+            <a:endParaRPr lang="en-US" dirty="0"/>
+          </a:p>
+          <a:p>
+            <a:pPr>
+              <a:lnSpc>
+                <a:spcPct val="150000"/>
+              </a:lnSpc>
+            </a:pPr>
+            <a:r>
+              <a:rPr lang="en-IN" dirty="0">
+                <a:hlinkClick r:id="rId3"/>
+              </a:rPr>
+              <a:t>https://www.kaggle.com/datasets/blastchar/telco-customer-churn</a:t>
             </a:r>
             <a:endParaRPr lang="en-IN" dirty="0"/>
           </a:p>
